--- a/DAEN459F26/presentation3.pptx
+++ b/DAEN459F26/presentation3.pptx
@@ -236,7 +236,7 @@
           <a:p>
             <a:fld id="{9BCFA349-295A-9648-AC81-268E9C74AF3D}" type="datetimeFigureOut">
               <a:rPr lang="en-US" smtClean="0"/>
-              <a:t>8/30/26</a:t>
+              <a:t>9/2/26</a:t>
             </a:fld>
             <a:endParaRPr lang="en-US"/>
           </a:p>
@@ -634,7 +634,7 @@
           <a:p>
             <a:fld id="{71E70913-1F13-4744-B94A-DD1167A56E7D}" type="datetime1">
               <a:rPr lang="en-US" smtClean="0"/>
-              <a:t>8/30/26</a:t>
+              <a:t>9/2/26</a:t>
             </a:fld>
             <a:endParaRPr lang="en-US"/>
           </a:p>
@@ -804,7 +804,7 @@
           <a:p>
             <a:fld id="{26BAC7D1-F120-9444-A8E9-CC8E63B024C0}" type="datetime1">
               <a:rPr lang="en-US" smtClean="0"/>
-              <a:t>8/30/26</a:t>
+              <a:t>9/2/26</a:t>
             </a:fld>
             <a:endParaRPr lang="en-US"/>
           </a:p>
@@ -984,7 +984,7 @@
           <a:p>
             <a:fld id="{49D86640-3593-E045-822D-D104552937CC}" type="datetime1">
               <a:rPr lang="en-US" smtClean="0"/>
-              <a:t>8/30/26</a:t>
+              <a:t>9/2/26</a:t>
             </a:fld>
             <a:endParaRPr lang="en-US"/>
           </a:p>
@@ -1154,7 +1154,7 @@
           <a:p>
             <a:fld id="{7F27163F-7EC9-5B47-A192-CB50DE612FED}" type="datetime1">
               <a:rPr lang="en-US" smtClean="0"/>
-              <a:t>8/30/26</a:t>
+              <a:t>9/2/26</a:t>
             </a:fld>
             <a:endParaRPr lang="en-US"/>
           </a:p>
@@ -1400,7 +1400,7 @@
           <a:p>
             <a:fld id="{7734F2BC-3CB7-1146-A19E-4D5E63F3B742}" type="datetime1">
               <a:rPr lang="en-US" smtClean="0"/>
-              <a:t>8/30/26</a:t>
+              <a:t>9/2/26</a:t>
             </a:fld>
             <a:endParaRPr lang="en-US"/>
           </a:p>
@@ -1632,7 +1632,7 @@
           <a:p>
             <a:fld id="{B7F91693-1844-8848-86CC-F923317986AD}" type="datetime1">
               <a:rPr lang="en-US" smtClean="0"/>
-              <a:t>8/30/26</a:t>
+              <a:t>9/2/26</a:t>
             </a:fld>
             <a:endParaRPr lang="en-US"/>
           </a:p>
@@ -1999,7 +1999,7 @@
           <a:p>
             <a:fld id="{42C7BDF2-3CCE-3449-B48D-F4595C3D57FE}" type="datetime1">
               <a:rPr lang="en-US" smtClean="0"/>
-              <a:t>8/30/26</a:t>
+              <a:t>9/2/26</a:t>
             </a:fld>
             <a:endParaRPr lang="en-US"/>
           </a:p>
@@ -2117,7 +2117,7 @@
           <a:p>
             <a:fld id="{9659FDB3-FCD2-A24F-8241-8DA72B16D6B1}" type="datetime1">
               <a:rPr lang="en-US" smtClean="0"/>
-              <a:t>8/30/26</a:t>
+              <a:t>9/2/26</a:t>
             </a:fld>
             <a:endParaRPr lang="en-US"/>
           </a:p>
@@ -2212,7 +2212,7 @@
           <a:p>
             <a:fld id="{006AC91C-CE34-DA4E-B4C2-6B29BDE88023}" type="datetime1">
               <a:rPr lang="en-US" smtClean="0"/>
-              <a:t>8/30/26</a:t>
+              <a:t>9/2/26</a:t>
             </a:fld>
             <a:endParaRPr lang="en-US"/>
           </a:p>
@@ -2489,7 +2489,7 @@
           <a:p>
             <a:fld id="{8DE724E1-3786-E644-95CD-0EC484282321}" type="datetime1">
               <a:rPr lang="en-US" smtClean="0"/>
-              <a:t>8/30/26</a:t>
+              <a:t>9/2/26</a:t>
             </a:fld>
             <a:endParaRPr lang="en-US"/>
           </a:p>
@@ -2746,7 +2746,7 @@
           <a:p>
             <a:fld id="{26DD75EC-C44D-6048-B3A9-C5F04F3202FD}" type="datetime1">
               <a:rPr lang="en-US" smtClean="0"/>
-              <a:t>8/30/26</a:t>
+              <a:t>9/2/26</a:t>
             </a:fld>
             <a:endParaRPr lang="en-US"/>
           </a:p>
@@ -2959,7 +2959,7 @@
           <a:p>
             <a:fld id="{497CE539-832A-BA41-9408-4A63384D7065}" type="datetime1">
               <a:rPr lang="en-US" smtClean="0"/>
-              <a:t>8/30/26</a:t>
+              <a:t>9/2/26</a:t>
             </a:fld>
             <a:endParaRPr lang="en-US"/>
           </a:p>
@@ -10570,7 +10570,7 @@
         <p:spPr>
           <a:xfrm>
             <a:off x="628650" y="1825625"/>
-            <a:ext cx="8134350" cy="4351338"/>
+            <a:ext cx="8404514" cy="4351338"/>
           </a:xfrm>
         </p:spPr>
         <p:txBody>
@@ -10581,7 +10581,25 @@
           <a:p>
             <a:r>
               <a:rPr lang="en-US" sz="2200" dirty="0"/>
-              <a:t>Let's try to make a short presentation sometime next week.</a:t>
+              <a:t>Let's try to make a short presentation: </a:t>
+            </a:r>
+            <a:r>
+              <a:rPr lang="en-US" sz="2200" dirty="0">
+                <a:highlight>
+                  <a:srgbClr val="FFFF00"/>
+                </a:highlight>
+              </a:rPr>
+              <a:t>Fri Sep 11 and/or Fri Sep 18</a:t>
+            </a:r>
+            <a:r>
+              <a:rPr lang="en-US" sz="2200" dirty="0"/>
+              <a:t>?</a:t>
+            </a:r>
+          </a:p>
+          <a:p>
+            <a:r>
+              <a:rPr lang="en-US" sz="2200" dirty="0"/>
+              <a:t>Teams can practice and we all (instructor + classmates) can provide input/feedback</a:t>
             </a:r>
           </a:p>
           <a:p>
@@ -10747,30 +10765,65 @@
             <p:ph idx="1"/>
           </p:nvPr>
         </p:nvSpPr>
-        <p:spPr/>
+        <p:spPr>
+          <a:xfrm>
+            <a:off x="628650" y="1690690"/>
+            <a:ext cx="7886700" cy="5030786"/>
+          </a:xfrm>
+        </p:spPr>
         <p:txBody>
           <a:bodyPr>
-            <a:normAutofit/>
+            <a:normAutofit fontScale="92500" lnSpcReduction="10000"/>
           </a:bodyPr>
           <a:lstStyle/>
           <a:p>
             <a:r>
+              <a:rPr lang="en-US" sz="2400" b="1" dirty="0"/>
+              <a:t>Problem Definition &amp; Motivation</a:t>
+            </a:r>
+            <a:r>
               <a:rPr lang="en-US" sz="2400" dirty="0"/>
-              <a:t>We all </a:t>
-            </a:r>
-            <a:r>
-              <a:rPr lang="en-US" sz="2400" baseline="30000" dirty="0"/>
-              <a:t>(instructor and classmates)</a:t>
+              <a:t>: Clearly defines the capstone problem, explains why it matters, and identifies the intended users, stakeholders, or business impact.</a:t>
+            </a:r>
+          </a:p>
+          <a:p>
+            <a:r>
+              <a:rPr lang="en-US" sz="2400" b="1" dirty="0"/>
+              <a:t>Project Scope &amp; Objectives</a:t>
             </a:r>
             <a:r>
               <a:rPr lang="en-US" sz="2400" dirty="0"/>
-              <a:t> can provide input/feedback</a:t>
-            </a:r>
-          </a:p>
-          <a:p>
+              <a:t>: Establishes realistic Phase 1 goals, specific deliverables, and clear boundaries for what is and is not included in the project.</a:t>
+            </a:r>
+          </a:p>
+          <a:p>
+            <a:r>
+              <a:rPr lang="en-US" sz="2400" b="1" dirty="0"/>
+              <a:t>Proposed Approach</a:t>
+            </a:r>
             <a:r>
               <a:rPr lang="en-US" sz="2400" dirty="0"/>
-              <a:t>Teams can practice</a:t>
+              <a:t>: Presents a logical technical approach, including anticipated data sources, tools, methods, architecture, or analytical techniques.</a:t>
+            </a:r>
+          </a:p>
+          <a:p>
+            <a:r>
+              <a:rPr lang="en-US" sz="2400" b="1" dirty="0"/>
+              <a:t>Feasibility &amp; Planning</a:t>
+            </a:r>
+            <a:r>
+              <a:rPr lang="en-US" sz="2400" dirty="0"/>
+              <a:t>: Demonstrates that the project is achievable within the available time and resources, with appropriate milestones, responsibilities, and identified risks.</a:t>
+            </a:r>
+          </a:p>
+          <a:p>
+            <a:r>
+              <a:rPr lang="en-US" sz="2400" b="1" dirty="0"/>
+              <a:t>Presentation Quality</a:t>
+            </a:r>
+            <a:r>
+              <a:rPr lang="en-US" sz="2400" dirty="0"/>
+              <a:t>: Communicates the project clearly and professionally, with effective visuals, organized content, and the ability to respond thoughtfully to questions.</a:t>
             </a:r>
           </a:p>
         </p:txBody>
@@ -10797,8 +10850,8 @@
         </p:blipFill>
         <p:spPr>
           <a:xfrm>
-            <a:off x="3336292" y="3429000"/>
-            <a:ext cx="2471415" cy="2141271"/>
+            <a:off x="7199106" y="173657"/>
+            <a:ext cx="1750930" cy="1517032"/>
           </a:xfrm>
           <a:prstGeom prst="rect">
             <a:avLst/>
